--- a/ppt/17.C언어-전처리기와빌드제어.pptx
+++ b/ppt/17.C언어-전처리기와빌드제어.pptx
@@ -43,24 +43,24 @@
   <p:notesSz cx="6858000" cy="9144000"/>
   <p:embeddedFontLst>
     <p:embeddedFont>
+      <p:font typeface="Consolas" panose="020B0609020204030204" pitchFamily="49" charset="0"/>
+      <p:regular r:id="rId33"/>
+      <p:bold r:id="rId34"/>
+      <p:italic r:id="rId35"/>
+      <p:boldItalic r:id="rId36"/>
+    </p:embeddedFont>
+    <p:embeddedFont>
       <p:font typeface="HY견고딕" panose="02030600000101010101" pitchFamily="18" charset="-127"/>
-      <p:regular r:id="rId33"/>
+      <p:regular r:id="rId37"/>
     </p:embeddedFont>
     <p:embeddedFont>
       <p:font typeface="가을체" panose="02030600000101010101" pitchFamily="18" charset="-127"/>
-      <p:regular r:id="rId34"/>
+      <p:regular r:id="rId38"/>
     </p:embeddedFont>
     <p:embeddedFont>
       <p:font typeface="나눔바른고딕" panose="020B0603020101020101" pitchFamily="50" charset="-127"/>
-      <p:regular r:id="rId35"/>
-      <p:bold r:id="rId36"/>
-    </p:embeddedFont>
-    <p:embeddedFont>
-      <p:font typeface="Consolas" panose="020B0609020204030204" pitchFamily="49" charset="0"/>
-      <p:regular r:id="rId37"/>
-      <p:bold r:id="rId38"/>
-      <p:italic r:id="rId39"/>
-      <p:boldItalic r:id="rId40"/>
+      <p:regular r:id="rId39"/>
+      <p:bold r:id="rId40"/>
     </p:embeddedFont>
   </p:embeddedFontLst>
   <p:defaultTextStyle>
@@ -8107,7 +8107,11 @@
           <a:p>
             <a:pPr lvl="1"/>
             <a:r>
-              <a:rPr lang="en-US" altLang="ko-KR" dirty="0"/>
+              <a:rPr lang="en-US" altLang="ko-KR" dirty="0">
+                <a:solidFill>
+                  <a:srgbClr val="7030A0"/>
+                </a:solidFill>
+              </a:rPr>
               <a:t>#if defined(_DEBUG)</a:t>
             </a:r>
           </a:p>
@@ -8142,7 +8146,11 @@
           </a:p>
           <a:p>
             <a:r>
-              <a:rPr lang="en-US" altLang="ko-KR" dirty="0"/>
+              <a:rPr lang="en-US" altLang="ko-KR" dirty="0">
+                <a:solidFill>
+                  <a:srgbClr val="7030A0"/>
+                </a:solidFill>
+              </a:rPr>
               <a:t>#undef</a:t>
             </a:r>
           </a:p>
@@ -9861,52 +9869,115 @@
             <a:pPr lvl="1"/>
             <a:r>
               <a:rPr lang="en-US" altLang="ko-KR" dirty="0"/>
-              <a:t>Windows → _WIN32, _WIN64</a:t>
+              <a:t>Windows → </a:t>
+            </a:r>
+            <a:r>
+              <a:rPr lang="en-US" altLang="ko-KR" dirty="0">
+                <a:solidFill>
+                  <a:srgbClr val="7030A0"/>
+                </a:solidFill>
+              </a:rPr>
+              <a:t>_WIN32, _WIN64</a:t>
             </a:r>
           </a:p>
           <a:p>
             <a:pPr lvl="1"/>
             <a:r>
               <a:rPr lang="en-US" altLang="ko-KR" dirty="0"/>
-              <a:t>Linux   → __</a:t>
-            </a:r>
-            <a:r>
-              <a:rPr lang="en-US" altLang="ko-KR" dirty="0" err="1"/>
+              <a:t>Linux   → </a:t>
+            </a:r>
+            <a:r>
+              <a:rPr lang="en-US" altLang="ko-KR" dirty="0">
+                <a:solidFill>
+                  <a:srgbClr val="7030A0"/>
+                </a:solidFill>
+              </a:rPr>
+              <a:t>__</a:t>
+            </a:r>
+            <a:r>
+              <a:rPr lang="en-US" altLang="ko-KR" dirty="0" err="1">
+                <a:solidFill>
+                  <a:srgbClr val="7030A0"/>
+                </a:solidFill>
+              </a:rPr>
               <a:t>linux</a:t>
             </a:r>
             <a:r>
+              <a:rPr lang="en-US" altLang="ko-KR" dirty="0">
+                <a:solidFill>
+                  <a:srgbClr val="7030A0"/>
+                </a:solidFill>
+              </a:rPr>
+              <a:t>__</a:t>
+            </a:r>
+          </a:p>
+          <a:p>
+            <a:pPr lvl="1"/>
+            <a:r>
               <a:rPr lang="en-US" altLang="ko-KR" dirty="0"/>
-              <a:t>__</a:t>
+              <a:t>Android → </a:t>
+            </a:r>
+            <a:r>
+              <a:rPr lang="en-US" altLang="ko-KR" dirty="0">
+                <a:solidFill>
+                  <a:srgbClr val="7030A0"/>
+                </a:solidFill>
+              </a:rPr>
+              <a:t>__ANDROID__</a:t>
             </a:r>
           </a:p>
           <a:p>
             <a:pPr lvl="1"/>
             <a:r>
               <a:rPr lang="en-US" altLang="ko-KR" dirty="0"/>
-              <a:t>Android → __ANDROID__</a:t>
+              <a:t>macOS → </a:t>
+            </a:r>
+            <a:r>
+              <a:rPr lang="en-US" altLang="ko-KR" dirty="0">
+                <a:solidFill>
+                  <a:srgbClr val="7030A0"/>
+                </a:solidFill>
+              </a:rPr>
+              <a:t>__APPLE__</a:t>
             </a:r>
           </a:p>
           <a:p>
             <a:pPr lvl="1"/>
             <a:r>
               <a:rPr lang="en-US" altLang="ko-KR" dirty="0"/>
-              <a:t>macOS → __APPLE__</a:t>
-            </a:r>
-          </a:p>
-          <a:p>
-            <a:pPr lvl="1"/>
+              <a:t>iOS →</a:t>
+            </a:r>
+            <a:r>
+              <a:rPr lang="en-US" altLang="ko-KR" dirty="0">
+                <a:solidFill>
+                  <a:srgbClr val="7030A0"/>
+                </a:solidFill>
+              </a:rPr>
+              <a:t>__APPLE__</a:t>
+            </a:r>
             <a:r>
               <a:rPr lang="en-US" altLang="ko-KR" dirty="0"/>
-              <a:t>iOS →__APPLE__ + TARGET_OS_IPHONE</a:t>
+              <a:t> + </a:t>
+            </a:r>
+            <a:r>
+              <a:rPr lang="en-US" altLang="ko-KR" dirty="0">
+                <a:solidFill>
+                  <a:srgbClr val="7030A0"/>
+                </a:solidFill>
+              </a:rPr>
+              <a:t>TARGET_OS_IPHONE</a:t>
             </a:r>
           </a:p>
           <a:p>
             <a:endParaRPr lang="en-US" altLang="ko-KR" dirty="0"/>
           </a:p>
           <a:p>
+            <a:pPr marL="0" indent="0">
+              <a:buNone/>
+            </a:pPr>
             <a:r>
               <a:rPr lang="en-US" altLang="ko-KR" dirty="0"/>
-              <a:t>→ </a:t>
+              <a:t>	→ </a:t>
             </a:r>
             <a:r>
               <a:rPr lang="ko-KR" altLang="en-US" dirty="0"/>
@@ -10051,7 +10122,13 @@
             </a:r>
           </a:p>
           <a:p>
-            <a:pPr lvl="1"/>
+            <a:pPr marL="457200" lvl="1" indent="0">
+              <a:buNone/>
+            </a:pPr>
+            <a:r>
+              <a:rPr lang="en-US" altLang="ko-KR" dirty="0"/>
+              <a:t>	</a:t>
+            </a:r>
             <a:r>
               <a:rPr lang="ko-KR" altLang="en-US" dirty="0"/>
               <a:t>→ 실행 비용 없음</a:t>
@@ -11337,7 +11414,9 @@
             <a:endParaRPr lang="ko-KR" altLang="en-US" sz="2800" dirty="0"/>
           </a:p>
           <a:p>
-            <a:pPr lvl="1"/>
+            <a:pPr marL="457200" lvl="1" indent="0">
+              <a:buNone/>
+            </a:pPr>
             <a:r>
               <a:rPr lang="ko-KR" altLang="en-US" sz="2800" dirty="0"/>
               <a:t>→ 코드가 그대로 복사됨</a:t>
@@ -13593,7 +13672,15 @@
             </a:r>
           </a:p>
           <a:p>
-            <a:pPr lvl="1"/>
+            <a:pPr marL="457200" lvl="1" indent="0">
+              <a:buNone/>
+            </a:pPr>
+            <a:endParaRPr lang="en-US" altLang="ko-KR" dirty="0"/>
+          </a:p>
+          <a:p>
+            <a:pPr marL="457200" lvl="1" indent="0">
+              <a:buNone/>
+            </a:pPr>
             <a:r>
               <a:rPr lang="ko-KR" altLang="en-US" dirty="0"/>
               <a:t>→ 빌드 구조 이해가 핵심</a:t>
@@ -16565,17 +16652,16 @@
                 <a:effectLst/>
                 <a:latin typeface="Consolas" panose="020B0609020204030204" pitchFamily="49" charset="0"/>
               </a:rPr>
-              <a:t>, __</a:t>
-            </a:r>
-            <a:r>
-              <a:rPr lang="en-US" altLang="ko-KR" sz="2000" b="1" i="0" u="none" strike="noStrike" dirty="0" err="1">
-                <a:solidFill>
-                  <a:srgbClr val="383A42"/>
-                </a:solidFill>
-                <a:effectLst/>
-                <a:latin typeface="Consolas" panose="020B0609020204030204" pitchFamily="49" charset="0"/>
-              </a:rPr>
-              <a:t>func</a:t>
+              <a:t>, </a:t>
+            </a:r>
+            <a:r>
+              <a:rPr lang="en-US" altLang="ko-KR" sz="2000" b="1" dirty="0">
+                <a:solidFill>
+                  <a:srgbClr val="0000FF"/>
+                </a:solidFill>
+                <a:latin typeface="Consolas" panose="020B0609020204030204" pitchFamily="49" charset="0"/>
+              </a:rPr>
+              <a:t>__func__</a:t>
             </a:r>
             <a:r>
               <a:rPr lang="en-US" altLang="ko-KR" sz="2000" b="1" i="0" u="none" strike="noStrike" dirty="0">
@@ -16585,7 +16671,7 @@
                 <a:effectLst/>
                 <a:latin typeface="Consolas" panose="020B0609020204030204" pitchFamily="49" charset="0"/>
               </a:rPr>
-              <a:t>__);</a:t>
+              <a:t>);</a:t>
             </a:r>
             <a:br>
               <a:rPr lang="en-US" altLang="ko-KR" sz="2000" b="1" i="0" u="none" strike="noStrike" dirty="0">
@@ -16606,7 +16692,9 @@
               </a:rPr>
               <a:t>}</a:t>
             </a:r>
-            <a:endParaRPr lang="ko-KR" altLang="en-US" sz="2000" b="1" dirty="0"/>
+            <a:endParaRPr lang="ko-KR" altLang="en-US" sz="2000" b="1" dirty="0">
+              <a:latin typeface="Consolas" panose="020B0609020204030204" pitchFamily="49" charset="0"/>
+            </a:endParaRPr>
           </a:p>
         </p:txBody>
       </p:sp>
